--- a/docs/HR_AI_Agent_FINAL_4june.pptx
+++ b/docs/HR_AI_Agent_FINAL_4june.pptx
@@ -3238,7 +3238,7 @@
                 </a:solidFill>
                 <a:latin typeface="Courier New"/>
               </a:rPr>
-              <a:t>├─ config/</a:t>
+              <a:t>├─ config/sources_catalog.py    ← 26 источников</a:t>
             </a:r>
           </a:p>
           <a:p>
@@ -3249,7 +3249,7 @@
                 </a:solidFill>
                 <a:latin typeface="Courier New"/>
               </a:rPr>
-              <a:t>│  ├─ settings.py</a:t>
+              <a:t>├─ dashboard/app.py</a:t>
             </a:r>
           </a:p>
           <a:p>
@@ -3260,7 +3260,7 @@
                 </a:solidFill>
                 <a:latin typeface="Courier New"/>
               </a:rPr>
-              <a:t>│  └─ sources_catalog.py   ← 26 источников</a:t>
+              <a:t>├─ src/</a:t>
             </a:r>
           </a:p>
           <a:p>
@@ -3271,7 +3271,7 @@
                 </a:solidFill>
                 <a:latin typeface="Courier New"/>
               </a:rPr>
-              <a:t>├─ dashboard/app.py</a:t>
+              <a:t>│  ├─ agent/</a:t>
             </a:r>
           </a:p>
           <a:p>
@@ -3282,7 +3282,7 @@
                 </a:solidFill>
                 <a:latin typeface="Courier New"/>
               </a:rPr>
-              <a:t>├─ src/</a:t>
+              <a:t>│  ├─ api/</a:t>
             </a:r>
           </a:p>
           <a:p>
@@ -3293,7 +3293,7 @@
                 </a:solidFill>
                 <a:latin typeface="Courier New"/>
               </a:rPr>
-              <a:t>│  ├─ agent/</a:t>
+              <a:t>│  │  ├─ gigachat.py</a:t>
             </a:r>
           </a:p>
           <a:p>
@@ -3304,7 +3304,7 @@
                 </a:solidFill>
                 <a:latin typeface="Courier New"/>
               </a:rPr>
-              <a:t>│  ├─ processing/deduplicator.py  ← SimHash</a:t>
+              <a:t>│  │  └─ rag.py                   ← NEW: RAG-контекст</a:t>
             </a:r>
           </a:p>
           <a:p>
@@ -3315,7 +3315,7 @@
                 </a:solidFill>
                 <a:latin typeface="Courier New"/>
               </a:rPr>
-              <a:t>│  ├─ sources/source_manager.py   ← авторегуляция</a:t>
+              <a:t>│  ├─ insights/</a:t>
             </a:r>
           </a:p>
           <a:p>
@@ -3326,7 +3326,7 @@
                 </a:solidFill>
                 <a:latin typeface="Courier New"/>
               </a:rPr>
-              <a:t>│  └─ sources/source_analytics.py ← per-source метрики</a:t>
+              <a:t>│  │  ├─ generator.py</a:t>
             </a:r>
           </a:p>
           <a:p>
@@ -3337,7 +3337,7 @@
                 </a:solidFill>
                 <a:latin typeface="Courier New"/>
               </a:rPr>
-              <a:t>├─ tests/                  ← 109 тестов</a:t>
+              <a:t>│  │  ├─ report_generator.py      ← NEW: MD/PDF-отчёт</a:t>
             </a:r>
           </a:p>
           <a:p>
@@ -3348,6 +3348,72 @@
                 </a:solidFill>
                 <a:latin typeface="Courier New"/>
               </a:rPr>
+              <a:t>│  │  └─ filters.py               ← NEW: поиск/фильтр</a:t>
+            </a:r>
+          </a:p>
+          <a:p>
+            <a:r>
+              <a:rPr sz="1000">
+                <a:solidFill>
+                  <a:srgbClr val="334155"/>
+                </a:solidFill>
+                <a:latin typeface="Courier New"/>
+              </a:rPr>
+              <a:t>│  ├─ processing/</a:t>
+            </a:r>
+          </a:p>
+          <a:p>
+            <a:r>
+              <a:rPr sz="1000">
+                <a:solidFill>
+                  <a:srgbClr val="334155"/>
+                </a:solidFill>
+                <a:latin typeface="Courier New"/>
+              </a:rPr>
+              <a:t>│  │  ├─ deduplicator.py          ← SimHash</a:t>
+            </a:r>
+          </a:p>
+          <a:p>
+            <a:r>
+              <a:rPr sz="1000">
+                <a:solidFill>
+                  <a:srgbClr val="334155"/>
+                </a:solidFill>
+                <a:latin typeface="Courier New"/>
+              </a:rPr>
+              <a:t>│  │  └─ quality_metrics.py       ← NEW: Cohen κ</a:t>
+            </a:r>
+          </a:p>
+          <a:p>
+            <a:r>
+              <a:rPr sz="1000">
+                <a:solidFill>
+                  <a:srgbClr val="334155"/>
+                </a:solidFill>
+                <a:latin typeface="Courier New"/>
+              </a:rPr>
+              <a:t>│  └─ sources/source_manager.py</a:t>
+            </a:r>
+          </a:p>
+          <a:p>
+            <a:r>
+              <a:rPr sz="1000">
+                <a:solidFill>
+                  <a:srgbClr val="334155"/>
+                </a:solidFill>
+                <a:latin typeface="Courier New"/>
+              </a:rPr>
+              <a:t>├─ tests/                          ← 138 тестов</a:t>
+            </a:r>
+          </a:p>
+          <a:p>
+            <a:r>
+              <a:rPr sz="1000">
+                <a:solidFill>
+                  <a:srgbClr val="334155"/>
+                </a:solidFill>
+                <a:latin typeface="Courier New"/>
+              </a:rPr>
               <a:t>│  └─ fixtures/labeled_news.json</a:t>
             </a:r>
           </a:p>
@@ -3359,7 +3425,7 @@
                 </a:solidFill>
                 <a:latin typeface="Courier New"/>
               </a:rPr>
-              <a:t>├─ docs/</a:t>
+              <a:t>├─ data/</a:t>
             </a:r>
           </a:p>
           <a:p>
@@ -3370,7 +3436,7 @@
                 </a:solidFill>
                 <a:latin typeface="Courier New"/>
               </a:rPr>
-              <a:t>│  ├─ METHODOLOGY.md</a:t>
+              <a:t>│  ├─ demo_state.json              ← золотое демо</a:t>
             </a:r>
           </a:p>
           <a:p>
@@ -3381,7 +3447,7 @@
                 </a:solidFill>
                 <a:latin typeface="Courier New"/>
               </a:rPr>
-              <a:t>│  └─ defense_script_mvp.md</a:t>
+              <a:t>│  └─ quality_metrics.json         ← κ=0.87 кэш</a:t>
             </a:r>
           </a:p>
           <a:p>
@@ -3392,7 +3458,7 @@
                 </a:solidFill>
                 <a:latin typeface="Courier New"/>
               </a:rPr>
-              <a:t>├─ scripts/demo_start.{sh,ps1}</a:t>
+              <a:t>├─ .github/workflows/</a:t>
             </a:r>
           </a:p>
           <a:p>
@@ -3403,7 +3469,7 @@
                 </a:solidFill>
                 <a:latin typeface="Courier New"/>
               </a:rPr>
-              <a:t>├─ .github/workflows/tests.yml</a:t>
+              <a:t>│  ├─ tests.yml</a:t>
             </a:r>
           </a:p>
           <a:p>
@@ -3414,7 +3480,7 @@
                 </a:solidFill>
                 <a:latin typeface="Courier New"/>
               </a:rPr>
-              <a:t>├─ Dockerfile + docker-compose.yml</a:t>
+              <a:t>│  └─ schedule.yml                 ← NEW: cron цикла</a:t>
             </a:r>
           </a:p>
           <a:p>
@@ -3425,7 +3491,18 @@
                 </a:solidFill>
                 <a:latin typeface="Courier New"/>
               </a:rPr>
-              <a:t>└─ requirements.txt + requirements-dev.txt</a:t>
+              <a:t>├─ docs/ + scripts/</a:t>
+            </a:r>
+          </a:p>
+          <a:p>
+            <a:r>
+              <a:rPr sz="1000">
+                <a:solidFill>
+                  <a:srgbClr val="334155"/>
+                </a:solidFill>
+                <a:latin typeface="Courier New"/>
+              </a:rPr>
+              <a:t>└─ Dockerfile + requirements.txt</a:t>
             </a:r>
           </a:p>
         </p:txBody>
@@ -9274,7 +9351,7 @@
                   <a:srgbClr val="334155"/>
                 </a:solidFill>
               </a:rPr>
-              <a:t>• ручной запуск цикла</a:t>
+              <a:t>• датасет разметки на стадии расширения</a:t>
             </a:r>
           </a:p>
           <a:p>
@@ -9284,7 +9361,7 @@
                   <a:srgbClr val="334155"/>
                 </a:solidFill>
               </a:rPr>
-              <a:t>• датасет разметки на стадии расширения</a:t>
+              <a:t>• Streamlit-сервер MVP, не промышленный стек</a:t>
             </a:r>
           </a:p>
         </p:txBody>
@@ -9414,60 +9491,54 @@
           </a:bodyPr>
           <a:lstStyle/>
           <a:p>
-            <a:pPr marL="0" indent="0">
-              <a:buNone/>
-            </a:pPr>
-            <a:r>
-              <a:rPr lang="en-US" sz="960" dirty="0">
+            <a:r>
+              <a:rPr sz="960">
                 <a:solidFill>
                   <a:srgbClr val="334155"/>
                 </a:solidFill>
               </a:rPr>
               <a:t>• не ждёт промпта</a:t>
             </a:r>
-            <a:endParaRPr lang="en-US" sz="960" dirty="0"/>
-          </a:p>
-          <a:p>
-            <a:pPr marL="0" indent="0">
-              <a:buNone/>
-            </a:pPr>
-            <a:r>
-              <a:rPr lang="en-US" sz="960" dirty="0">
+          </a:p>
+          <a:p>
+            <a:r>
+              <a:rPr sz="960">
                 <a:solidFill>
                   <a:srgbClr val="334155"/>
                 </a:solidFill>
               </a:rPr>
               <a:t>• работает с HR-категориями</a:t>
             </a:r>
-            <a:endParaRPr lang="en-US" sz="960" dirty="0"/>
-          </a:p>
-          <a:p>
-            <a:pPr marL="0" indent="0">
-              <a:buNone/>
-            </a:pPr>
-            <a:r>
-              <a:rPr lang="en-US" sz="960" dirty="0">
+          </a:p>
+          <a:p>
+            <a:r>
+              <a:rPr sz="960">
                 <a:solidFill>
                   <a:srgbClr val="334155"/>
                 </a:solidFill>
               </a:rPr>
               <a:t>• запоминает обработанные материалы</a:t>
             </a:r>
-            <a:endParaRPr lang="en-US" sz="960" dirty="0"/>
-          </a:p>
-          <a:p>
-            <a:pPr marL="0" indent="0">
-              <a:buNone/>
-            </a:pPr>
-            <a:r>
-              <a:rPr lang="en-US" sz="960" dirty="0">
+          </a:p>
+          <a:p>
+            <a:r>
+              <a:rPr sz="960">
                 <a:solidFill>
                   <a:srgbClr val="334155"/>
                 </a:solidFill>
               </a:rPr>
               <a:t>• выдаёт не текстовый ответ, а приоритетный сигнал</a:t>
             </a:r>
-            <a:endParaRPr lang="en-US" sz="960" dirty="0"/>
+          </a:p>
+          <a:p>
+            <a:r>
+              <a:rPr sz="960">
+                <a:solidFill>
+                  <a:srgbClr val="334155"/>
+                </a:solidFill>
+              </a:rPr>
+              <a:t>• диалог «Спроси у HR-агента» поверх собранного состояния</a:t>
+            </a:r>
           </a:p>
         </p:txBody>
       </p:sp>
@@ -12972,7 +13043,7 @@
                   <a:srgbClr val="0B1F33"/>
                 </a:solidFill>
               </a:rPr>
-              <a:t>Тесты и CI</a:t>
+              <a:t>RAG-чат «Спроси у HR-агента»</a:t>
             </a:r>
           </a:p>
         </p:txBody>
@@ -13006,7 +13077,7 @@
                   <a:srgbClr val="334155"/>
                 </a:solidFill>
               </a:rPr>
-              <a:t>109 автотестов проходят зелёными, CI на GitHub Actions с матрицей Python 3.10 / 3.11, Ruff lint и pytest-coverage.</a:t>
+              <a:t>Диалоговая прослойка поверх собранного состояния агента. GigaChat отвечает строго по текущим инсайтам/алертам/наблюдениям. Закрывает сценарий «уточнить ситуацию» без нового цикла.</a:t>
             </a:r>
           </a:p>
         </p:txBody>
@@ -13106,7 +13177,7 @@
                   <a:srgbClr val="0B1F33"/>
                 </a:solidFill>
               </a:rPr>
-              <a:t>Авторегуляция пула</a:t>
+              <a:t>Экспорт ежедневного отчёта</a:t>
             </a:r>
           </a:p>
         </p:txBody>
@@ -13140,7 +13211,7 @@
                   <a:srgbClr val="334155"/>
                 </a:solidFill>
               </a:rPr>
-              <a:t>Модуль source_manager отслеживает duplicate_rate и активность источников и автоматически рекомендует деактивацию шумных и активацию ценных кандидатов.</a:t>
+              <a:t>Кнопки в дашборде: Markdown и PDF. Готовая выжимка для HR-руководителя — критические события за 24 ч, топ-направления, инсайты, метрики. Один клик — pdf на руководителя.</a:t>
             </a:r>
           </a:p>
         </p:txBody>
@@ -13240,7 +13311,7 @@
                   <a:srgbClr val="0B1F33"/>
                 </a:solidFill>
               </a:rPr>
-              <a:t>Аналитика источников</a:t>
+              <a:t>Поиск и тематический фильтр</a:t>
             </a:r>
           </a:p>
         </p:txBody>
@@ -13274,7 +13345,7 @@
                   <a:srgbClr val="334155"/>
                 </a:solidFill>
               </a:rPr>
-              <a:t>source_analytics считает per-source метрики: items_fetched, duplicate_rate, avg_risk_score, topic_coverage, unique_contribution — реальные цифры в дашборде.</a:t>
+              <a:t>По уже обработанным новостям: ключевое слово + multiselect по HR-темам. AND-семантика, регистронезависимо. Аналитик сразу находит конкретный сигнал среди сотен наблюдений.</a:t>
             </a:r>
           </a:p>
         </p:txBody>
@@ -13374,7 +13445,7 @@
                   <a:srgbClr val="0B1F33"/>
                 </a:solidFill>
               </a:rPr>
-              <a:t>SimHash-дедупликация</a:t>
+              <a:t>Cohen's κ = 0.87 на дашборде</a:t>
             </a:r>
           </a:p>
         </p:txBody>
@@ -13408,7 +13479,7 @@
                   <a:srgbClr val="334155"/>
                 </a:solidFill>
               </a:rPr>
-              <a:t>Двухуровневая фильтрация: URL-уровень и контентный SimHash. Самописная имплементация без внешних зависимостей, видны кросс-источниковые дубли.</a:t>
+              <a:t>Измеримое качество классификатора: κ=0.867, accuracy=88.6% на 35 размеченных HR-новостях. Шкала Landis &amp; Koch — почти идеальное согласие. Видно прямо на дашборде, не «модель умно работает», а число.</a:t>
             </a:r>
           </a:p>
         </p:txBody>
@@ -13508,7 +13579,7 @@
                   <a:srgbClr val="0B1F33"/>
                 </a:solidFill>
               </a:rPr>
-              <a:t>Качество классификации</a:t>
+              <a:t>Реально проактивный режим</a:t>
             </a:r>
           </a:p>
         </p:txBody>
@@ -13542,7 +13613,7 @@
                   <a:srgbClr val="334155"/>
                 </a:solidFill>
               </a:rPr>
-              <a:t>Размеченный датасет labeled_news.json (35 новостей, 7 HR-тем, RU/EN). По нему считается Cohen's Kappa между разметчиками — верхняя граница качества модели.</a:t>
+              <a:t>GitHub Actions cron 0 * * * * — цикл агента раз в час фоном, снапшоты в ветку state-snapshots. Закрывает слабое место «ручной запуск». Плюс золотое состояние demo_state.json как fallback демо.</a:t>
             </a:r>
           </a:p>
         </p:txBody>
